--- a/bright-32-feature-sheet.pptx
+++ b/bright-32-feature-sheet.pptx
@@ -3088,20 +3088,12 @@
         <p:nvPr/>
       </p:nvGrpSpPr>
       <p:grpSpPr/>
-      <p:pic>
-        <p:nvPicPr>
-          <p:cNvPr id="2" name="Picture 1" descr="bright-32-feature-sheet.png"/>
-          <p:cNvPicPr>
-            <a:picLocks noChangeAspect="1"/>
-          </p:cNvPicPr>
+      <p:sp>
+        <p:nvSpPr>
+          <p:cNvPr id="2" name="Rectangle 1"/>
+          <p:cNvSpPr/>
           <p:nvPr/>
-        </p:nvPicPr>
-        <p:blipFill>
-          <a:blip r:embed="rId2"/>
-          <a:stretch>
-            <a:fillRect/>
-          </a:stretch>
-        </p:blipFill>
+        </p:nvSpPr>
         <p:spPr>
           <a:xfrm>
             <a:off x="0" y="0"/>
@@ -3110,8 +3102,1656 @@
           <a:prstGeom prst="rect">
             <a:avLst/>
           </a:prstGeom>
-        </p:spPr>
-      </p:pic>
+          <a:solidFill>
+            <a:srgbClr val="FBFAF7"/>
+          </a:solidFill>
+          <a:ln>
+            <a:noFill/>
+          </a:ln>
+          <a:effectLst/>
+        </p:spPr>
+        <p:style>
+          <a:lnRef idx="1">
+            <a:schemeClr val="accent1"/>
+          </a:lnRef>
+          <a:fillRef idx="3">
+            <a:schemeClr val="accent1"/>
+          </a:fillRef>
+          <a:effectRef idx="2">
+            <a:schemeClr val="accent1"/>
+          </a:effectRef>
+          <a:fontRef idx="minor">
+            <a:schemeClr val="lt1"/>
+          </a:fontRef>
+        </p:style>
+        <p:txBody>
+          <a:bodyPr rtlCol="0" anchor="ctr"/>
+          <a:lstStyle/>
+          <a:p>
+            <a:pPr algn="ctr"/>
+          </a:p>
+        </p:txBody>
+      </p:sp>
+      <p:sp>
+        <p:nvSpPr>
+          <p:cNvPr id="3" name="Rectangle 2"/>
+          <p:cNvSpPr/>
+          <p:nvPr/>
+        </p:nvSpPr>
+        <p:spPr>
+          <a:xfrm>
+            <a:off x="762000" y="1419225"/>
+            <a:ext cx="10620375" cy="9525"/>
+          </a:xfrm>
+          <a:prstGeom prst="rect">
+            <a:avLst/>
+          </a:prstGeom>
+          <a:solidFill>
+            <a:srgbClr val="C9D2C2"/>
+          </a:solidFill>
+          <a:ln>
+            <a:noFill/>
+          </a:ln>
+          <a:effectLst/>
+        </p:spPr>
+        <p:style>
+          <a:lnRef idx="1">
+            <a:schemeClr val="accent1"/>
+          </a:lnRef>
+          <a:fillRef idx="3">
+            <a:schemeClr val="accent1"/>
+          </a:fillRef>
+          <a:effectRef idx="2">
+            <a:schemeClr val="accent1"/>
+          </a:effectRef>
+          <a:fontRef idx="minor">
+            <a:schemeClr val="lt1"/>
+          </a:fontRef>
+        </p:style>
+        <p:txBody>
+          <a:bodyPr rtlCol="0" anchor="ctr"/>
+          <a:lstStyle/>
+          <a:p>
+            <a:pPr algn="ctr"/>
+          </a:p>
+        </p:txBody>
+      </p:sp>
+      <p:sp>
+        <p:nvSpPr>
+          <p:cNvPr id="4" name="Rectangle 3"/>
+          <p:cNvSpPr/>
+          <p:nvPr/>
+        </p:nvSpPr>
+        <p:spPr>
+          <a:xfrm>
+            <a:off x="762000" y="1752600"/>
+            <a:ext cx="10620375" cy="4953000"/>
+          </a:xfrm>
+          <a:prstGeom prst="rect">
+            <a:avLst/>
+          </a:prstGeom>
+          <a:solidFill>
+            <a:srgbClr val="EDE7DD"/>
+          </a:solidFill>
+          <a:ln>
+            <a:noFill/>
+          </a:ln>
+          <a:effectLst/>
+        </p:spPr>
+        <p:style>
+          <a:lnRef idx="1">
+            <a:schemeClr val="accent1"/>
+          </a:lnRef>
+          <a:fillRef idx="3">
+            <a:schemeClr val="accent1"/>
+          </a:fillRef>
+          <a:effectRef idx="2">
+            <a:schemeClr val="accent1"/>
+          </a:effectRef>
+          <a:fontRef idx="minor">
+            <a:schemeClr val="lt1"/>
+          </a:fontRef>
+        </p:style>
+        <p:txBody>
+          <a:bodyPr rtlCol="0" anchor="ctr"/>
+          <a:lstStyle/>
+          <a:p>
+            <a:pPr algn="ctr"/>
+          </a:p>
+        </p:txBody>
+      </p:sp>
+      <p:sp>
+        <p:nvSpPr>
+          <p:cNvPr id="5" name="Rectangle 4"/>
+          <p:cNvSpPr/>
+          <p:nvPr/>
+        </p:nvSpPr>
+        <p:spPr>
+          <a:xfrm>
+            <a:off x="762000" y="1752600"/>
+            <a:ext cx="10620375" cy="9525"/>
+          </a:xfrm>
+          <a:prstGeom prst="rect">
+            <a:avLst/>
+          </a:prstGeom>
+          <a:solidFill>
+            <a:srgbClr val="CED6C7"/>
+          </a:solidFill>
+          <a:ln>
+            <a:noFill/>
+          </a:ln>
+          <a:effectLst/>
+        </p:spPr>
+        <p:style>
+          <a:lnRef idx="1">
+            <a:schemeClr val="accent1"/>
+          </a:lnRef>
+          <a:fillRef idx="3">
+            <a:schemeClr val="accent1"/>
+          </a:fillRef>
+          <a:effectRef idx="2">
+            <a:schemeClr val="accent1"/>
+          </a:effectRef>
+          <a:fontRef idx="minor">
+            <a:schemeClr val="lt1"/>
+          </a:fontRef>
+        </p:style>
+        <p:txBody>
+          <a:bodyPr rtlCol="0" anchor="ctr"/>
+          <a:lstStyle/>
+          <a:p>
+            <a:pPr algn="ctr"/>
+          </a:p>
+        </p:txBody>
+      </p:sp>
+      <p:sp>
+        <p:nvSpPr>
+          <p:cNvPr id="6" name="Rectangle 5"/>
+          <p:cNvSpPr/>
+          <p:nvPr/>
+        </p:nvSpPr>
+        <p:spPr>
+          <a:xfrm>
+            <a:off x="762000" y="6696075"/>
+            <a:ext cx="10620375" cy="9525"/>
+          </a:xfrm>
+          <a:prstGeom prst="rect">
+            <a:avLst/>
+          </a:prstGeom>
+          <a:solidFill>
+            <a:srgbClr val="CED6C7"/>
+          </a:solidFill>
+          <a:ln>
+            <a:noFill/>
+          </a:ln>
+          <a:effectLst/>
+        </p:spPr>
+        <p:style>
+          <a:lnRef idx="1">
+            <a:schemeClr val="accent1"/>
+          </a:lnRef>
+          <a:fillRef idx="3">
+            <a:schemeClr val="accent1"/>
+          </a:fillRef>
+          <a:effectRef idx="2">
+            <a:schemeClr val="accent1"/>
+          </a:effectRef>
+          <a:fontRef idx="minor">
+            <a:schemeClr val="lt1"/>
+          </a:fontRef>
+        </p:style>
+        <p:txBody>
+          <a:bodyPr rtlCol="0" anchor="ctr"/>
+          <a:lstStyle/>
+          <a:p>
+            <a:pPr algn="ctr"/>
+          </a:p>
+        </p:txBody>
+      </p:sp>
+      <p:sp>
+        <p:nvSpPr>
+          <p:cNvPr id="7" name="Rectangle 6"/>
+          <p:cNvSpPr/>
+          <p:nvPr/>
+        </p:nvSpPr>
+        <p:spPr>
+          <a:xfrm>
+            <a:off x="762000" y="1752600"/>
+            <a:ext cx="9525" cy="4953000"/>
+          </a:xfrm>
+          <a:prstGeom prst="rect">
+            <a:avLst/>
+          </a:prstGeom>
+          <a:solidFill>
+            <a:srgbClr val="CED6C7"/>
+          </a:solidFill>
+          <a:ln>
+            <a:noFill/>
+          </a:ln>
+          <a:effectLst/>
+        </p:spPr>
+        <p:style>
+          <a:lnRef idx="1">
+            <a:schemeClr val="accent1"/>
+          </a:lnRef>
+          <a:fillRef idx="3">
+            <a:schemeClr val="accent1"/>
+          </a:fillRef>
+          <a:effectRef idx="2">
+            <a:schemeClr val="accent1"/>
+          </a:effectRef>
+          <a:fontRef idx="minor">
+            <a:schemeClr val="lt1"/>
+          </a:fontRef>
+        </p:style>
+        <p:txBody>
+          <a:bodyPr rtlCol="0" anchor="ctr"/>
+          <a:lstStyle/>
+          <a:p>
+            <a:pPr algn="ctr"/>
+          </a:p>
+        </p:txBody>
+      </p:sp>
+      <p:sp>
+        <p:nvSpPr>
+          <p:cNvPr id="8" name="Rectangle 7"/>
+          <p:cNvSpPr/>
+          <p:nvPr/>
+        </p:nvSpPr>
+        <p:spPr>
+          <a:xfrm>
+            <a:off x="11372850" y="1752600"/>
+            <a:ext cx="9525" cy="4953000"/>
+          </a:xfrm>
+          <a:prstGeom prst="rect">
+            <a:avLst/>
+          </a:prstGeom>
+          <a:solidFill>
+            <a:srgbClr val="CED6C7"/>
+          </a:solidFill>
+          <a:ln>
+            <a:noFill/>
+          </a:ln>
+          <a:effectLst/>
+        </p:spPr>
+        <p:style>
+          <a:lnRef idx="1">
+            <a:schemeClr val="accent1"/>
+          </a:lnRef>
+          <a:fillRef idx="3">
+            <a:schemeClr val="accent1"/>
+          </a:fillRef>
+          <a:effectRef idx="2">
+            <a:schemeClr val="accent1"/>
+          </a:effectRef>
+          <a:fontRef idx="minor">
+            <a:schemeClr val="lt1"/>
+          </a:fontRef>
+        </p:style>
+        <p:txBody>
+          <a:bodyPr rtlCol="0" anchor="ctr"/>
+          <a:lstStyle/>
+          <a:p>
+            <a:pPr algn="ctr"/>
+          </a:p>
+        </p:txBody>
+      </p:sp>
+      <p:sp>
+        <p:nvSpPr>
+          <p:cNvPr id="9" name="Rectangle 8"/>
+          <p:cNvSpPr/>
+          <p:nvPr/>
+        </p:nvSpPr>
+        <p:spPr>
+          <a:xfrm>
+            <a:off x="762000" y="6934200"/>
+            <a:ext cx="3387626" cy="1905000"/>
+          </a:xfrm>
+          <a:prstGeom prst="rect">
+            <a:avLst/>
+          </a:prstGeom>
+          <a:solidFill>
+            <a:srgbClr val="EDE7DD"/>
+          </a:solidFill>
+          <a:ln>
+            <a:noFill/>
+          </a:ln>
+          <a:effectLst/>
+        </p:spPr>
+        <p:style>
+          <a:lnRef idx="1">
+            <a:schemeClr val="accent1"/>
+          </a:lnRef>
+          <a:fillRef idx="3">
+            <a:schemeClr val="accent1"/>
+          </a:fillRef>
+          <a:effectRef idx="2">
+            <a:schemeClr val="accent1"/>
+          </a:effectRef>
+          <a:fontRef idx="minor">
+            <a:schemeClr val="lt1"/>
+          </a:fontRef>
+        </p:style>
+        <p:txBody>
+          <a:bodyPr rtlCol="0" anchor="ctr"/>
+          <a:lstStyle/>
+          <a:p>
+            <a:pPr algn="ctr"/>
+          </a:p>
+        </p:txBody>
+      </p:sp>
+      <p:sp>
+        <p:nvSpPr>
+          <p:cNvPr id="10" name="Rectangle 9"/>
+          <p:cNvSpPr/>
+          <p:nvPr/>
+        </p:nvSpPr>
+        <p:spPr>
+          <a:xfrm>
+            <a:off x="762000" y="6934200"/>
+            <a:ext cx="3387626" cy="9525"/>
+          </a:xfrm>
+          <a:prstGeom prst="rect">
+            <a:avLst/>
+          </a:prstGeom>
+          <a:solidFill>
+            <a:srgbClr val="CED6C7"/>
+          </a:solidFill>
+          <a:ln>
+            <a:noFill/>
+          </a:ln>
+          <a:effectLst/>
+        </p:spPr>
+        <p:style>
+          <a:lnRef idx="1">
+            <a:schemeClr val="accent1"/>
+          </a:lnRef>
+          <a:fillRef idx="3">
+            <a:schemeClr val="accent1"/>
+          </a:fillRef>
+          <a:effectRef idx="2">
+            <a:schemeClr val="accent1"/>
+          </a:effectRef>
+          <a:fontRef idx="minor">
+            <a:schemeClr val="lt1"/>
+          </a:fontRef>
+        </p:style>
+        <p:txBody>
+          <a:bodyPr rtlCol="0" anchor="ctr"/>
+          <a:lstStyle/>
+          <a:p>
+            <a:pPr algn="ctr"/>
+          </a:p>
+        </p:txBody>
+      </p:sp>
+      <p:sp>
+        <p:nvSpPr>
+          <p:cNvPr id="11" name="Rectangle 10"/>
+          <p:cNvSpPr/>
+          <p:nvPr/>
+        </p:nvSpPr>
+        <p:spPr>
+          <a:xfrm>
+            <a:off x="762000" y="8829675"/>
+            <a:ext cx="3387626" cy="9525"/>
+          </a:xfrm>
+          <a:prstGeom prst="rect">
+            <a:avLst/>
+          </a:prstGeom>
+          <a:solidFill>
+            <a:srgbClr val="CED6C7"/>
+          </a:solidFill>
+          <a:ln>
+            <a:noFill/>
+          </a:ln>
+          <a:effectLst/>
+        </p:spPr>
+        <p:style>
+          <a:lnRef idx="1">
+            <a:schemeClr val="accent1"/>
+          </a:lnRef>
+          <a:fillRef idx="3">
+            <a:schemeClr val="accent1"/>
+          </a:fillRef>
+          <a:effectRef idx="2">
+            <a:schemeClr val="accent1"/>
+          </a:effectRef>
+          <a:fontRef idx="minor">
+            <a:schemeClr val="lt1"/>
+          </a:fontRef>
+        </p:style>
+        <p:txBody>
+          <a:bodyPr rtlCol="0" anchor="ctr"/>
+          <a:lstStyle/>
+          <a:p>
+            <a:pPr algn="ctr"/>
+          </a:p>
+        </p:txBody>
+      </p:sp>
+      <p:sp>
+        <p:nvSpPr>
+          <p:cNvPr id="12" name="Rectangle 11"/>
+          <p:cNvSpPr/>
+          <p:nvPr/>
+        </p:nvSpPr>
+        <p:spPr>
+          <a:xfrm>
+            <a:off x="762000" y="6934200"/>
+            <a:ext cx="9525" cy="1905000"/>
+          </a:xfrm>
+          <a:prstGeom prst="rect">
+            <a:avLst/>
+          </a:prstGeom>
+          <a:solidFill>
+            <a:srgbClr val="CED6C7"/>
+          </a:solidFill>
+          <a:ln>
+            <a:noFill/>
+          </a:ln>
+          <a:effectLst/>
+        </p:spPr>
+        <p:style>
+          <a:lnRef idx="1">
+            <a:schemeClr val="accent1"/>
+          </a:lnRef>
+          <a:fillRef idx="3">
+            <a:schemeClr val="accent1"/>
+          </a:fillRef>
+          <a:effectRef idx="2">
+            <a:schemeClr val="accent1"/>
+          </a:effectRef>
+          <a:fontRef idx="minor">
+            <a:schemeClr val="lt1"/>
+          </a:fontRef>
+        </p:style>
+        <p:txBody>
+          <a:bodyPr rtlCol="0" anchor="ctr"/>
+          <a:lstStyle/>
+          <a:p>
+            <a:pPr algn="ctr"/>
+          </a:p>
+        </p:txBody>
+      </p:sp>
+      <p:sp>
+        <p:nvSpPr>
+          <p:cNvPr id="13" name="Rectangle 12"/>
+          <p:cNvSpPr/>
+          <p:nvPr/>
+        </p:nvSpPr>
+        <p:spPr>
+          <a:xfrm>
+            <a:off x="4140101" y="6934200"/>
+            <a:ext cx="9525" cy="1905000"/>
+          </a:xfrm>
+          <a:prstGeom prst="rect">
+            <a:avLst/>
+          </a:prstGeom>
+          <a:solidFill>
+            <a:srgbClr val="CED6C7"/>
+          </a:solidFill>
+          <a:ln>
+            <a:noFill/>
+          </a:ln>
+          <a:effectLst/>
+        </p:spPr>
+        <p:style>
+          <a:lnRef idx="1">
+            <a:schemeClr val="accent1"/>
+          </a:lnRef>
+          <a:fillRef idx="3">
+            <a:schemeClr val="accent1"/>
+          </a:fillRef>
+          <a:effectRef idx="2">
+            <a:schemeClr val="accent1"/>
+          </a:effectRef>
+          <a:fontRef idx="minor">
+            <a:schemeClr val="lt1"/>
+          </a:fontRef>
+        </p:style>
+        <p:txBody>
+          <a:bodyPr rtlCol="0" anchor="ctr"/>
+          <a:lstStyle/>
+          <a:p>
+            <a:pPr algn="ctr"/>
+          </a:p>
+        </p:txBody>
+      </p:sp>
+      <p:sp>
+        <p:nvSpPr>
+          <p:cNvPr id="14" name="Rectangle 13"/>
+          <p:cNvSpPr/>
+          <p:nvPr/>
+        </p:nvSpPr>
+        <p:spPr>
+          <a:xfrm>
+            <a:off x="4378226" y="6934200"/>
+            <a:ext cx="3387775" cy="1905000"/>
+          </a:xfrm>
+          <a:prstGeom prst="rect">
+            <a:avLst/>
+          </a:prstGeom>
+          <a:solidFill>
+            <a:srgbClr val="EDE7DD"/>
+          </a:solidFill>
+          <a:ln>
+            <a:noFill/>
+          </a:ln>
+          <a:effectLst/>
+        </p:spPr>
+        <p:style>
+          <a:lnRef idx="1">
+            <a:schemeClr val="accent1"/>
+          </a:lnRef>
+          <a:fillRef idx="3">
+            <a:schemeClr val="accent1"/>
+          </a:fillRef>
+          <a:effectRef idx="2">
+            <a:schemeClr val="accent1"/>
+          </a:effectRef>
+          <a:fontRef idx="minor">
+            <a:schemeClr val="lt1"/>
+          </a:fontRef>
+        </p:style>
+        <p:txBody>
+          <a:bodyPr rtlCol="0" anchor="ctr"/>
+          <a:lstStyle/>
+          <a:p>
+            <a:pPr algn="ctr"/>
+          </a:p>
+        </p:txBody>
+      </p:sp>
+      <p:sp>
+        <p:nvSpPr>
+          <p:cNvPr id="15" name="Rectangle 14"/>
+          <p:cNvSpPr/>
+          <p:nvPr/>
+        </p:nvSpPr>
+        <p:spPr>
+          <a:xfrm>
+            <a:off x="4378226" y="6934200"/>
+            <a:ext cx="3387775" cy="9525"/>
+          </a:xfrm>
+          <a:prstGeom prst="rect">
+            <a:avLst/>
+          </a:prstGeom>
+          <a:solidFill>
+            <a:srgbClr val="CED6C7"/>
+          </a:solidFill>
+          <a:ln>
+            <a:noFill/>
+          </a:ln>
+          <a:effectLst/>
+        </p:spPr>
+        <p:style>
+          <a:lnRef idx="1">
+            <a:schemeClr val="accent1"/>
+          </a:lnRef>
+          <a:fillRef idx="3">
+            <a:schemeClr val="accent1"/>
+          </a:fillRef>
+          <a:effectRef idx="2">
+            <a:schemeClr val="accent1"/>
+          </a:effectRef>
+          <a:fontRef idx="minor">
+            <a:schemeClr val="lt1"/>
+          </a:fontRef>
+        </p:style>
+        <p:txBody>
+          <a:bodyPr rtlCol="0" anchor="ctr"/>
+          <a:lstStyle/>
+          <a:p>
+            <a:pPr algn="ctr"/>
+          </a:p>
+        </p:txBody>
+      </p:sp>
+      <p:sp>
+        <p:nvSpPr>
+          <p:cNvPr id="16" name="Rectangle 15"/>
+          <p:cNvSpPr/>
+          <p:nvPr/>
+        </p:nvSpPr>
+        <p:spPr>
+          <a:xfrm>
+            <a:off x="4378226" y="8829675"/>
+            <a:ext cx="3387775" cy="9525"/>
+          </a:xfrm>
+          <a:prstGeom prst="rect">
+            <a:avLst/>
+          </a:prstGeom>
+          <a:solidFill>
+            <a:srgbClr val="CED6C7"/>
+          </a:solidFill>
+          <a:ln>
+            <a:noFill/>
+          </a:ln>
+          <a:effectLst/>
+        </p:spPr>
+        <p:style>
+          <a:lnRef idx="1">
+            <a:schemeClr val="accent1"/>
+          </a:lnRef>
+          <a:fillRef idx="3">
+            <a:schemeClr val="accent1"/>
+          </a:fillRef>
+          <a:effectRef idx="2">
+            <a:schemeClr val="accent1"/>
+          </a:effectRef>
+          <a:fontRef idx="minor">
+            <a:schemeClr val="lt1"/>
+          </a:fontRef>
+        </p:style>
+        <p:txBody>
+          <a:bodyPr rtlCol="0" anchor="ctr"/>
+          <a:lstStyle/>
+          <a:p>
+            <a:pPr algn="ctr"/>
+          </a:p>
+        </p:txBody>
+      </p:sp>
+      <p:sp>
+        <p:nvSpPr>
+          <p:cNvPr id="17" name="Rectangle 16"/>
+          <p:cNvSpPr/>
+          <p:nvPr/>
+        </p:nvSpPr>
+        <p:spPr>
+          <a:xfrm>
+            <a:off x="4378226" y="6934200"/>
+            <a:ext cx="9525" cy="1905000"/>
+          </a:xfrm>
+          <a:prstGeom prst="rect">
+            <a:avLst/>
+          </a:prstGeom>
+          <a:solidFill>
+            <a:srgbClr val="CED6C7"/>
+          </a:solidFill>
+          <a:ln>
+            <a:noFill/>
+          </a:ln>
+          <a:effectLst/>
+        </p:spPr>
+        <p:style>
+          <a:lnRef idx="1">
+            <a:schemeClr val="accent1"/>
+          </a:lnRef>
+          <a:fillRef idx="3">
+            <a:schemeClr val="accent1"/>
+          </a:fillRef>
+          <a:effectRef idx="2">
+            <a:schemeClr val="accent1"/>
+          </a:effectRef>
+          <a:fontRef idx="minor">
+            <a:schemeClr val="lt1"/>
+          </a:fontRef>
+        </p:style>
+        <p:txBody>
+          <a:bodyPr rtlCol="0" anchor="ctr"/>
+          <a:lstStyle/>
+          <a:p>
+            <a:pPr algn="ctr"/>
+          </a:p>
+        </p:txBody>
+      </p:sp>
+      <p:sp>
+        <p:nvSpPr>
+          <p:cNvPr id="18" name="Rectangle 17"/>
+          <p:cNvSpPr/>
+          <p:nvPr/>
+        </p:nvSpPr>
+        <p:spPr>
+          <a:xfrm>
+            <a:off x="7756475" y="6934200"/>
+            <a:ext cx="9525" cy="1905000"/>
+          </a:xfrm>
+          <a:prstGeom prst="rect">
+            <a:avLst/>
+          </a:prstGeom>
+          <a:solidFill>
+            <a:srgbClr val="CED6C7"/>
+          </a:solidFill>
+          <a:ln>
+            <a:noFill/>
+          </a:ln>
+          <a:effectLst/>
+        </p:spPr>
+        <p:style>
+          <a:lnRef idx="1">
+            <a:schemeClr val="accent1"/>
+          </a:lnRef>
+          <a:fillRef idx="3">
+            <a:schemeClr val="accent1"/>
+          </a:fillRef>
+          <a:effectRef idx="2">
+            <a:schemeClr val="accent1"/>
+          </a:effectRef>
+          <a:fontRef idx="minor">
+            <a:schemeClr val="lt1"/>
+          </a:fontRef>
+        </p:style>
+        <p:txBody>
+          <a:bodyPr rtlCol="0" anchor="ctr"/>
+          <a:lstStyle/>
+          <a:p>
+            <a:pPr algn="ctr"/>
+          </a:p>
+        </p:txBody>
+      </p:sp>
+      <p:sp>
+        <p:nvSpPr>
+          <p:cNvPr id="19" name="Rectangle 18"/>
+          <p:cNvSpPr/>
+          <p:nvPr/>
+        </p:nvSpPr>
+        <p:spPr>
+          <a:xfrm>
+            <a:off x="7994600" y="6934200"/>
+            <a:ext cx="3387775" cy="1905000"/>
+          </a:xfrm>
+          <a:prstGeom prst="rect">
+            <a:avLst/>
+          </a:prstGeom>
+          <a:solidFill>
+            <a:srgbClr val="EDE7DD"/>
+          </a:solidFill>
+          <a:ln>
+            <a:noFill/>
+          </a:ln>
+          <a:effectLst/>
+        </p:spPr>
+        <p:style>
+          <a:lnRef idx="1">
+            <a:schemeClr val="accent1"/>
+          </a:lnRef>
+          <a:fillRef idx="3">
+            <a:schemeClr val="accent1"/>
+          </a:fillRef>
+          <a:effectRef idx="2">
+            <a:schemeClr val="accent1"/>
+          </a:effectRef>
+          <a:fontRef idx="minor">
+            <a:schemeClr val="lt1"/>
+          </a:fontRef>
+        </p:style>
+        <p:txBody>
+          <a:bodyPr rtlCol="0" anchor="ctr"/>
+          <a:lstStyle/>
+          <a:p>
+            <a:pPr algn="ctr"/>
+          </a:p>
+        </p:txBody>
+      </p:sp>
+      <p:sp>
+        <p:nvSpPr>
+          <p:cNvPr id="20" name="Rectangle 19"/>
+          <p:cNvSpPr/>
+          <p:nvPr/>
+        </p:nvSpPr>
+        <p:spPr>
+          <a:xfrm>
+            <a:off x="7994600" y="6934200"/>
+            <a:ext cx="3387775" cy="9525"/>
+          </a:xfrm>
+          <a:prstGeom prst="rect">
+            <a:avLst/>
+          </a:prstGeom>
+          <a:solidFill>
+            <a:srgbClr val="CED6C7"/>
+          </a:solidFill>
+          <a:ln>
+            <a:noFill/>
+          </a:ln>
+          <a:effectLst/>
+        </p:spPr>
+        <p:style>
+          <a:lnRef idx="1">
+            <a:schemeClr val="accent1"/>
+          </a:lnRef>
+          <a:fillRef idx="3">
+            <a:schemeClr val="accent1"/>
+          </a:fillRef>
+          <a:effectRef idx="2">
+            <a:schemeClr val="accent1"/>
+          </a:effectRef>
+          <a:fontRef idx="minor">
+            <a:schemeClr val="lt1"/>
+          </a:fontRef>
+        </p:style>
+        <p:txBody>
+          <a:bodyPr rtlCol="0" anchor="ctr"/>
+          <a:lstStyle/>
+          <a:p>
+            <a:pPr algn="ctr"/>
+          </a:p>
+        </p:txBody>
+      </p:sp>
+      <p:sp>
+        <p:nvSpPr>
+          <p:cNvPr id="21" name="Rectangle 20"/>
+          <p:cNvSpPr/>
+          <p:nvPr/>
+        </p:nvSpPr>
+        <p:spPr>
+          <a:xfrm>
+            <a:off x="7994600" y="8829675"/>
+            <a:ext cx="3387775" cy="9525"/>
+          </a:xfrm>
+          <a:prstGeom prst="rect">
+            <a:avLst/>
+          </a:prstGeom>
+          <a:solidFill>
+            <a:srgbClr val="CED6C7"/>
+          </a:solidFill>
+          <a:ln>
+            <a:noFill/>
+          </a:ln>
+          <a:effectLst/>
+        </p:spPr>
+        <p:style>
+          <a:lnRef idx="1">
+            <a:schemeClr val="accent1"/>
+          </a:lnRef>
+          <a:fillRef idx="3">
+            <a:schemeClr val="accent1"/>
+          </a:fillRef>
+          <a:effectRef idx="2">
+            <a:schemeClr val="accent1"/>
+          </a:effectRef>
+          <a:fontRef idx="minor">
+            <a:schemeClr val="lt1"/>
+          </a:fontRef>
+        </p:style>
+        <p:txBody>
+          <a:bodyPr rtlCol="0" anchor="ctr"/>
+          <a:lstStyle/>
+          <a:p>
+            <a:pPr algn="ctr"/>
+          </a:p>
+        </p:txBody>
+      </p:sp>
+      <p:sp>
+        <p:nvSpPr>
+          <p:cNvPr id="22" name="Rectangle 21"/>
+          <p:cNvSpPr/>
+          <p:nvPr/>
+        </p:nvSpPr>
+        <p:spPr>
+          <a:xfrm>
+            <a:off x="7994600" y="6934200"/>
+            <a:ext cx="9525" cy="1905000"/>
+          </a:xfrm>
+          <a:prstGeom prst="rect">
+            <a:avLst/>
+          </a:prstGeom>
+          <a:solidFill>
+            <a:srgbClr val="CED6C7"/>
+          </a:solidFill>
+          <a:ln>
+            <a:noFill/>
+          </a:ln>
+          <a:effectLst/>
+        </p:spPr>
+        <p:style>
+          <a:lnRef idx="1">
+            <a:schemeClr val="accent1"/>
+          </a:lnRef>
+          <a:fillRef idx="3">
+            <a:schemeClr val="accent1"/>
+          </a:fillRef>
+          <a:effectRef idx="2">
+            <a:schemeClr val="accent1"/>
+          </a:effectRef>
+          <a:fontRef idx="minor">
+            <a:schemeClr val="lt1"/>
+          </a:fontRef>
+        </p:style>
+        <p:txBody>
+          <a:bodyPr rtlCol="0" anchor="ctr"/>
+          <a:lstStyle/>
+          <a:p>
+            <a:pPr algn="ctr"/>
+          </a:p>
+        </p:txBody>
+      </p:sp>
+      <p:sp>
+        <p:nvSpPr>
+          <p:cNvPr id="23" name="Rectangle 22"/>
+          <p:cNvSpPr/>
+          <p:nvPr/>
+        </p:nvSpPr>
+        <p:spPr>
+          <a:xfrm>
+            <a:off x="11372850" y="6934200"/>
+            <a:ext cx="9525" cy="1905000"/>
+          </a:xfrm>
+          <a:prstGeom prst="rect">
+            <a:avLst/>
+          </a:prstGeom>
+          <a:solidFill>
+            <a:srgbClr val="CED6C7"/>
+          </a:solidFill>
+          <a:ln>
+            <a:noFill/>
+          </a:ln>
+          <a:effectLst/>
+        </p:spPr>
+        <p:style>
+          <a:lnRef idx="1">
+            <a:schemeClr val="accent1"/>
+          </a:lnRef>
+          <a:fillRef idx="3">
+            <a:schemeClr val="accent1"/>
+          </a:fillRef>
+          <a:effectRef idx="2">
+            <a:schemeClr val="accent1"/>
+          </a:effectRef>
+          <a:fontRef idx="minor">
+            <a:schemeClr val="lt1"/>
+          </a:fontRef>
+        </p:style>
+        <p:txBody>
+          <a:bodyPr rtlCol="0" anchor="ctr"/>
+          <a:lstStyle/>
+          <a:p>
+            <a:pPr algn="ctr"/>
+          </a:p>
+        </p:txBody>
+      </p:sp>
+      <p:sp>
+        <p:nvSpPr>
+          <p:cNvPr id="24" name="Rectangle 23"/>
+          <p:cNvSpPr/>
+          <p:nvPr/>
+        </p:nvSpPr>
+        <p:spPr>
+          <a:xfrm>
+            <a:off x="762000" y="10163175"/>
+            <a:ext cx="10620375" cy="9525"/>
+          </a:xfrm>
+          <a:prstGeom prst="rect">
+            <a:avLst/>
+          </a:prstGeom>
+          <a:solidFill>
+            <a:srgbClr val="C9D2C2"/>
+          </a:solidFill>
+          <a:ln>
+            <a:noFill/>
+          </a:ln>
+          <a:effectLst/>
+        </p:spPr>
+        <p:style>
+          <a:lnRef idx="1">
+            <a:schemeClr val="accent1"/>
+          </a:lnRef>
+          <a:fillRef idx="3">
+            <a:schemeClr val="accent1"/>
+          </a:fillRef>
+          <a:effectRef idx="2">
+            <a:schemeClr val="accent1"/>
+          </a:effectRef>
+          <a:fontRef idx="minor">
+            <a:schemeClr val="lt1"/>
+          </a:fontRef>
+        </p:style>
+        <p:txBody>
+          <a:bodyPr rtlCol="0" anchor="ctr"/>
+          <a:lstStyle/>
+          <a:p>
+            <a:pPr algn="ctr"/>
+          </a:p>
+        </p:txBody>
+      </p:sp>
+      <p:sp>
+        <p:nvSpPr>
+          <p:cNvPr id="25" name="Rectangle 24"/>
+          <p:cNvSpPr/>
+          <p:nvPr/>
+        </p:nvSpPr>
+        <p:spPr>
+          <a:xfrm>
+            <a:off x="762000" y="10763250"/>
+            <a:ext cx="10620375" cy="9525"/>
+          </a:xfrm>
+          <a:prstGeom prst="rect">
+            <a:avLst/>
+          </a:prstGeom>
+          <a:solidFill>
+            <a:srgbClr val="C9D2C2"/>
+          </a:solidFill>
+          <a:ln>
+            <a:noFill/>
+          </a:ln>
+          <a:effectLst/>
+        </p:spPr>
+        <p:style>
+          <a:lnRef idx="1">
+            <a:schemeClr val="accent1"/>
+          </a:lnRef>
+          <a:fillRef idx="3">
+            <a:schemeClr val="accent1"/>
+          </a:fillRef>
+          <a:effectRef idx="2">
+            <a:schemeClr val="accent1"/>
+          </a:effectRef>
+          <a:fontRef idx="minor">
+            <a:schemeClr val="lt1"/>
+          </a:fontRef>
+        </p:style>
+        <p:txBody>
+          <a:bodyPr rtlCol="0" anchor="ctr"/>
+          <a:lstStyle/>
+          <a:p>
+            <a:pPr algn="ctr"/>
+          </a:p>
+        </p:txBody>
+      </p:sp>
+      <p:sp>
+        <p:nvSpPr>
+          <p:cNvPr id="26" name="Rectangle 25"/>
+          <p:cNvSpPr/>
+          <p:nvPr/>
+        </p:nvSpPr>
+        <p:spPr>
+          <a:xfrm>
+            <a:off x="762000" y="14573250"/>
+            <a:ext cx="10620375" cy="9525"/>
+          </a:xfrm>
+          <a:prstGeom prst="rect">
+            <a:avLst/>
+          </a:prstGeom>
+          <a:solidFill>
+            <a:srgbClr val="C9D2C2"/>
+          </a:solidFill>
+          <a:ln>
+            <a:noFill/>
+          </a:ln>
+          <a:effectLst/>
+        </p:spPr>
+        <p:style>
+          <a:lnRef idx="1">
+            <a:schemeClr val="accent1"/>
+          </a:lnRef>
+          <a:fillRef idx="3">
+            <a:schemeClr val="accent1"/>
+          </a:fillRef>
+          <a:effectRef idx="2">
+            <a:schemeClr val="accent1"/>
+          </a:effectRef>
+          <a:fontRef idx="minor">
+            <a:schemeClr val="lt1"/>
+          </a:fontRef>
+        </p:style>
+        <p:txBody>
+          <a:bodyPr rtlCol="0" anchor="ctr"/>
+          <a:lstStyle/>
+          <a:p>
+            <a:pPr algn="ctr"/>
+          </a:p>
+        </p:txBody>
+      </p:sp>
+      <p:sp>
+        <p:nvSpPr>
+          <p:cNvPr id="27" name="TextBox 26"/>
+          <p:cNvSpPr txBox="1"/>
+          <p:nvPr/>
+        </p:nvSpPr>
+        <p:spPr>
+          <a:xfrm>
+            <a:off x="762000" y="762000"/>
+            <a:ext cx="6057424" cy="447675"/>
+          </a:xfrm>
+          <a:prstGeom prst="rect">
+            <a:avLst/>
+          </a:prstGeom>
+          <a:noFill/>
+        </p:spPr>
+        <p:txBody>
+          <a:bodyPr wrap="none" anchor="t" lIns="0" rIns="0" tIns="0" bIns="0"/>
+          <a:lstStyle/>
+          <a:p>
+            <a:pPr algn="l"/>
+            <a:r>
+              <a:rPr sz="3000" i="1" b="0">
+                <a:solidFill>
+                  <a:srgbClr val="33322E"/>
+                </a:solidFill>
+                <a:latin typeface="Cormorant Garamond"/>
+                <a:ea typeface="Cormorant Garamond"/>
+                <a:cs typeface="Cormorant Garamond"/>
+              </a:rPr>
+              <a:t>Property Feature Sheet</a:t>
+            </a:r>
+          </a:p>
+        </p:txBody>
+      </p:sp>
+      <p:sp>
+        <p:nvSpPr>
+          <p:cNvPr id="28" name="TextBox 27"/>
+          <p:cNvSpPr txBox="1"/>
+          <p:nvPr/>
+        </p:nvSpPr>
+        <p:spPr>
+          <a:xfrm>
+            <a:off x="10296971" y="904875"/>
+            <a:ext cx="2117646" cy="161925"/>
+          </a:xfrm>
+          <a:prstGeom prst="rect">
+            <a:avLst/>
+          </a:prstGeom>
+          <a:noFill/>
+        </p:spPr>
+        <p:txBody>
+          <a:bodyPr wrap="none" anchor="t" lIns="0" rIns="0" tIns="0" bIns="0"/>
+          <a:lstStyle/>
+          <a:p>
+            <a:pPr algn="l"/>
+            <a:r>
+              <a:rPr sz="825" i="0" b="0" spc="247">
+                <a:solidFill>
+                  <a:srgbClr val="97A98C"/>
+                </a:solidFill>
+                <a:latin typeface="Poppins"/>
+                <a:ea typeface="Poppins"/>
+                <a:cs typeface="Poppins"/>
+              </a:rPr>
+              <a:t>MAYA ELLISON</a:t>
+            </a:r>
+          </a:p>
+        </p:txBody>
+      </p:sp>
+      <p:sp>
+        <p:nvSpPr>
+          <p:cNvPr id="29" name="TextBox 28"/>
+          <p:cNvSpPr txBox="1"/>
+          <p:nvPr/>
+        </p:nvSpPr>
+        <p:spPr>
+          <a:xfrm>
+            <a:off x="5550098" y="4143375"/>
+            <a:ext cx="2051685" cy="171450"/>
+          </a:xfrm>
+          <a:prstGeom prst="rect">
+            <a:avLst/>
+          </a:prstGeom>
+          <a:noFill/>
+        </p:spPr>
+        <p:txBody>
+          <a:bodyPr wrap="none" anchor="t" lIns="0" rIns="0" tIns="0" bIns="0"/>
+          <a:lstStyle/>
+          <a:p>
+            <a:pPr algn="l"/>
+            <a:r>
+              <a:rPr sz="900" i="0" b="0" spc="270">
+                <a:solidFill>
+                  <a:srgbClr val="8A867E"/>
+                </a:solidFill>
+                <a:latin typeface="Poppins"/>
+                <a:ea typeface="Poppins"/>
+                <a:cs typeface="Poppins"/>
+              </a:rPr>
+              <a:t>MAIN PHOTO</a:t>
+            </a:r>
+          </a:p>
+        </p:txBody>
+      </p:sp>
+      <p:sp>
+        <p:nvSpPr>
+          <p:cNvPr id="30" name="TextBox 29"/>
+          <p:cNvSpPr txBox="1"/>
+          <p:nvPr/>
+        </p:nvSpPr>
+        <p:spPr>
+          <a:xfrm>
+            <a:off x="2176611" y="7800975"/>
+            <a:ext cx="1274207" cy="171450"/>
+          </a:xfrm>
+          <a:prstGeom prst="rect">
+            <a:avLst/>
+          </a:prstGeom>
+          <a:noFill/>
+        </p:spPr>
+        <p:txBody>
+          <a:bodyPr wrap="none" anchor="t" lIns="0" rIns="0" tIns="0" bIns="0"/>
+          <a:lstStyle/>
+          <a:p>
+            <a:pPr algn="l"/>
+            <a:r>
+              <a:rPr sz="900" i="0" b="0" spc="270">
+                <a:solidFill>
+                  <a:srgbClr val="8A867E"/>
+                </a:solidFill>
+                <a:latin typeface="Poppins"/>
+                <a:ea typeface="Poppins"/>
+                <a:cs typeface="Poppins"/>
+              </a:rPr>
+              <a:t>PHOTO</a:t>
+            </a:r>
+          </a:p>
+        </p:txBody>
+      </p:sp>
+      <p:sp>
+        <p:nvSpPr>
+          <p:cNvPr id="31" name="TextBox 30"/>
+          <p:cNvSpPr txBox="1"/>
+          <p:nvPr/>
+        </p:nvSpPr>
+        <p:spPr>
+          <a:xfrm>
+            <a:off x="5792986" y="7800975"/>
+            <a:ext cx="1274207" cy="171450"/>
+          </a:xfrm>
+          <a:prstGeom prst="rect">
+            <a:avLst/>
+          </a:prstGeom>
+          <a:noFill/>
+        </p:spPr>
+        <p:txBody>
+          <a:bodyPr wrap="none" anchor="t" lIns="0" rIns="0" tIns="0" bIns="0"/>
+          <a:lstStyle/>
+          <a:p>
+            <a:pPr algn="l"/>
+            <a:r>
+              <a:rPr sz="900" i="0" b="0" spc="270">
+                <a:solidFill>
+                  <a:srgbClr val="8A867E"/>
+                </a:solidFill>
+                <a:latin typeface="Poppins"/>
+                <a:ea typeface="Poppins"/>
+                <a:cs typeface="Poppins"/>
+              </a:rPr>
+              <a:t>PHOTO</a:t>
+            </a:r>
+          </a:p>
+        </p:txBody>
+      </p:sp>
+      <p:sp>
+        <p:nvSpPr>
+          <p:cNvPr id="32" name="TextBox 31"/>
+          <p:cNvSpPr txBox="1"/>
+          <p:nvPr/>
+        </p:nvSpPr>
+        <p:spPr>
+          <a:xfrm>
+            <a:off x="9409361" y="7800975"/>
+            <a:ext cx="1274207" cy="171450"/>
+          </a:xfrm>
+          <a:prstGeom prst="rect">
+            <a:avLst/>
+          </a:prstGeom>
+          <a:noFill/>
+        </p:spPr>
+        <p:txBody>
+          <a:bodyPr wrap="none" anchor="t" lIns="0" rIns="0" tIns="0" bIns="0"/>
+          <a:lstStyle/>
+          <a:p>
+            <a:pPr algn="l"/>
+            <a:r>
+              <a:rPr sz="900" i="0" b="0" spc="270">
+                <a:solidFill>
+                  <a:srgbClr val="8A867E"/>
+                </a:solidFill>
+                <a:latin typeface="Poppins"/>
+                <a:ea typeface="Poppins"/>
+                <a:cs typeface="Poppins"/>
+              </a:rPr>
+              <a:t>PHOTO</a:t>
+            </a:r>
+          </a:p>
+        </p:txBody>
+      </p:sp>
+      <p:sp>
+        <p:nvSpPr>
+          <p:cNvPr id="33" name="TextBox 32"/>
+          <p:cNvSpPr txBox="1"/>
+          <p:nvPr/>
+        </p:nvSpPr>
+        <p:spPr>
+          <a:xfrm>
+            <a:off x="762000" y="9163050"/>
+            <a:ext cx="5688806" cy="504825"/>
+          </a:xfrm>
+          <a:prstGeom prst="rect">
+            <a:avLst/>
+          </a:prstGeom>
+          <a:noFill/>
+        </p:spPr>
+        <p:txBody>
+          <a:bodyPr wrap="none" anchor="t" lIns="0" rIns="0" tIns="0" bIns="0"/>
+          <a:lstStyle/>
+          <a:p>
+            <a:pPr algn="l"/>
+            <a:r>
+              <a:rPr sz="3450" i="0" b="0">
+                <a:solidFill>
+                  <a:srgbClr val="33322E"/>
+                </a:solidFill>
+                <a:latin typeface="Cormorant Garamond"/>
+                <a:ea typeface="Cormorant Garamond"/>
+                <a:cs typeface="Cormorant Garamond"/>
+              </a:rPr>
+              <a:t>117 Larkspur Lane</a:t>
+            </a:r>
+          </a:p>
+        </p:txBody>
+      </p:sp>
+      <p:sp>
+        <p:nvSpPr>
+          <p:cNvPr id="34" name="TextBox 33"/>
+          <p:cNvSpPr txBox="1"/>
+          <p:nvPr/>
+        </p:nvSpPr>
+        <p:spPr>
+          <a:xfrm>
+            <a:off x="762000" y="9725025"/>
+            <a:ext cx="5688806" cy="190500"/>
+          </a:xfrm>
+          <a:prstGeom prst="rect">
+            <a:avLst/>
+          </a:prstGeom>
+          <a:noFill/>
+        </p:spPr>
+        <p:txBody>
+          <a:bodyPr wrap="none" anchor="t" lIns="0" rIns="0" tIns="0" bIns="0"/>
+          <a:lstStyle/>
+          <a:p>
+            <a:pPr algn="l"/>
+            <a:r>
+              <a:rPr sz="975" i="0" b="0" spc="195">
+                <a:solidFill>
+                  <a:srgbClr val="8A867E"/>
+                </a:solidFill>
+                <a:latin typeface="Poppins"/>
+                <a:ea typeface="Poppins"/>
+                <a:cs typeface="Poppins"/>
+              </a:rPr>
+              <a:t>AUSTIN, TX 78704</a:t>
+            </a:r>
+          </a:p>
+        </p:txBody>
+      </p:sp>
+      <p:sp>
+        <p:nvSpPr>
+          <p:cNvPr id="35" name="TextBox 34"/>
+          <p:cNvSpPr txBox="1"/>
+          <p:nvPr/>
+        </p:nvSpPr>
+        <p:spPr>
+          <a:xfrm>
+            <a:off x="9596438" y="9363075"/>
+            <a:ext cx="3238500" cy="552450"/>
+          </a:xfrm>
+          <a:prstGeom prst="rect">
+            <a:avLst/>
+          </a:prstGeom>
+          <a:noFill/>
+        </p:spPr>
+        <p:txBody>
+          <a:bodyPr wrap="none" anchor="t" lIns="0" rIns="0" tIns="0" bIns="0"/>
+          <a:lstStyle/>
+          <a:p>
+            <a:pPr algn="l"/>
+            <a:r>
+              <a:rPr sz="3750" i="0" b="1">
+                <a:solidFill>
+                  <a:srgbClr val="97A98C"/>
+                </a:solidFill>
+                <a:latin typeface="Cormorant Garamond"/>
+                <a:ea typeface="Cormorant Garamond"/>
+                <a:cs typeface="Cormorant Garamond"/>
+              </a:rPr>
+              <a:t>$740,000</a:t>
+            </a:r>
+          </a:p>
+        </p:txBody>
+      </p:sp>
+      <p:sp>
+        <p:nvSpPr>
+          <p:cNvPr id="36" name="TextBox 35"/>
+          <p:cNvSpPr txBox="1"/>
+          <p:nvPr/>
+        </p:nvSpPr>
+        <p:spPr>
+          <a:xfrm>
+            <a:off x="762000" y="10382250"/>
+            <a:ext cx="1207056" cy="171450"/>
+          </a:xfrm>
+          <a:prstGeom prst="rect">
+            <a:avLst/>
+          </a:prstGeom>
+          <a:noFill/>
+        </p:spPr>
+        <p:txBody>
+          <a:bodyPr wrap="none" anchor="t" lIns="0" rIns="0" tIns="0" bIns="0"/>
+          <a:lstStyle/>
+          <a:p>
+            <a:pPr algn="l"/>
+            <a:r>
+              <a:rPr sz="900" i="0" b="0" spc="180">
+                <a:solidFill>
+                  <a:srgbClr val="33322E"/>
+                </a:solidFill>
+                <a:latin typeface="Poppins"/>
+                <a:ea typeface="Poppins"/>
+                <a:cs typeface="Poppins"/>
+              </a:rPr>
+              <a:t>4 BEDS</a:t>
+            </a:r>
+          </a:p>
+        </p:txBody>
+      </p:sp>
+      <p:sp>
+        <p:nvSpPr>
+          <p:cNvPr id="37" name="TextBox 36"/>
+          <p:cNvSpPr txBox="1"/>
+          <p:nvPr/>
+        </p:nvSpPr>
+        <p:spPr>
+          <a:xfrm>
+            <a:off x="2947690" y="10382250"/>
+            <a:ext cx="1361837" cy="171450"/>
+          </a:xfrm>
+          <a:prstGeom prst="rect">
+            <a:avLst/>
+          </a:prstGeom>
+          <a:noFill/>
+        </p:spPr>
+        <p:txBody>
+          <a:bodyPr wrap="none" anchor="t" lIns="0" rIns="0" tIns="0" bIns="0"/>
+          <a:lstStyle/>
+          <a:p>
+            <a:pPr algn="l"/>
+            <a:r>
+              <a:rPr sz="900" i="0" b="0" spc="180">
+                <a:solidFill>
+                  <a:srgbClr val="33322E"/>
+                </a:solidFill>
+                <a:latin typeface="Poppins"/>
+                <a:ea typeface="Poppins"/>
+                <a:cs typeface="Poppins"/>
+              </a:rPr>
+              <a:t>3 BATHS</a:t>
+            </a:r>
+          </a:p>
+        </p:txBody>
+      </p:sp>
+      <p:sp>
+        <p:nvSpPr>
+          <p:cNvPr id="38" name="TextBox 37"/>
+          <p:cNvSpPr txBox="1"/>
+          <p:nvPr/>
+        </p:nvSpPr>
+        <p:spPr>
+          <a:xfrm>
+            <a:off x="5230118" y="10382250"/>
+            <a:ext cx="1810226" cy="171450"/>
+          </a:xfrm>
+          <a:prstGeom prst="rect">
+            <a:avLst/>
+          </a:prstGeom>
+          <a:noFill/>
+        </p:spPr>
+        <p:txBody>
+          <a:bodyPr wrap="none" anchor="t" lIns="0" rIns="0" tIns="0" bIns="0"/>
+          <a:lstStyle/>
+          <a:p>
+            <a:pPr algn="l"/>
+            <a:r>
+              <a:rPr sz="900" i="0" b="0" spc="180">
+                <a:solidFill>
+                  <a:srgbClr val="33322E"/>
+                </a:solidFill>
+                <a:latin typeface="Poppins"/>
+                <a:ea typeface="Poppins"/>
+                <a:cs typeface="Poppins"/>
+              </a:rPr>
+              <a:t>2,480 SQ FT</a:t>
+            </a:r>
+          </a:p>
+        </p:txBody>
+      </p:sp>
+      <p:sp>
+        <p:nvSpPr>
+          <p:cNvPr id="39" name="TextBox 38"/>
+          <p:cNvSpPr txBox="1"/>
+          <p:nvPr/>
+        </p:nvSpPr>
+        <p:spPr>
+          <a:xfrm>
+            <a:off x="7792789" y="10382250"/>
+            <a:ext cx="2186464" cy="171450"/>
+          </a:xfrm>
+          <a:prstGeom prst="rect">
+            <a:avLst/>
+          </a:prstGeom>
+          <a:noFill/>
+        </p:spPr>
+        <p:txBody>
+          <a:bodyPr wrap="none" anchor="t" lIns="0" rIns="0" tIns="0" bIns="0"/>
+          <a:lstStyle/>
+          <a:p>
+            <a:pPr algn="l"/>
+            <a:r>
+              <a:rPr sz="900" i="0" b="0" spc="180">
+                <a:solidFill>
+                  <a:srgbClr val="33322E"/>
+                </a:solidFill>
+                <a:latin typeface="Poppins"/>
+                <a:ea typeface="Poppins"/>
+                <a:cs typeface="Poppins"/>
+              </a:rPr>
+              <a:t>2-CAR GARAGE</a:t>
+            </a:r>
+          </a:p>
+        </p:txBody>
+      </p:sp>
+      <p:sp>
+        <p:nvSpPr>
+          <p:cNvPr id="40" name="TextBox 39"/>
+          <p:cNvSpPr txBox="1"/>
+          <p:nvPr/>
+        </p:nvSpPr>
+        <p:spPr>
+          <a:xfrm>
+            <a:off x="10590609" y="10382250"/>
+            <a:ext cx="1647825" cy="171450"/>
+          </a:xfrm>
+          <a:prstGeom prst="rect">
+            <a:avLst/>
+          </a:prstGeom>
+          <a:noFill/>
+        </p:spPr>
+        <p:txBody>
+          <a:bodyPr wrap="none" anchor="t" lIns="0" rIns="0" tIns="0" bIns="0"/>
+          <a:lstStyle/>
+          <a:p>
+            <a:pPr algn="l"/>
+            <a:r>
+              <a:rPr sz="900" i="0" b="0" spc="180">
+                <a:solidFill>
+                  <a:srgbClr val="33322E"/>
+                </a:solidFill>
+                <a:latin typeface="Poppins"/>
+                <a:ea typeface="Poppins"/>
+                <a:cs typeface="Poppins"/>
+              </a:rPr>
+              <a:t>BUILT 2019</a:t>
+            </a:r>
+          </a:p>
+        </p:txBody>
+      </p:sp>
+      <p:sp>
+        <p:nvSpPr>
+          <p:cNvPr id="41" name="TextBox 40"/>
+          <p:cNvSpPr txBox="1"/>
+          <p:nvPr/>
+        </p:nvSpPr>
+        <p:spPr>
+          <a:xfrm>
+            <a:off x="762000" y="11020425"/>
+            <a:ext cx="9525000" cy="548580"/>
+          </a:xfrm>
+          <a:prstGeom prst="rect">
+            <a:avLst/>
+          </a:prstGeom>
+          <a:noFill/>
+        </p:spPr>
+        <p:txBody>
+          <a:bodyPr wrap="square" anchor="t" lIns="0" rIns="0" tIns="0" bIns="0"/>
+          <a:lstStyle/>
+          <a:p>
+            <a:pPr algn="l">
+              <a:lnSpc>
+                <a:spcPct val="180000"/>
+              </a:lnSpc>
+            </a:pPr>
+            <a:r>
+              <a:rPr sz="1200" i="0" b="0">
+                <a:solidFill>
+                  <a:srgbClr val="33322E"/>
+                </a:solidFill>
+                <a:latin typeface="Lato"/>
+                <a:ea typeface="Lato"/>
+                <a:cs typeface="Lato"/>
+              </a:rPr>
+              <a:t>Sun-filled open plan with white oak floors, a chef’s kitchen in warm stone, and walls of glass opening to a private garden. Walkable to cafes, parks, and top-rated schools.</a:t>
+            </a:r>
+          </a:p>
+        </p:txBody>
+      </p:sp>
+      <p:sp>
+        <p:nvSpPr>
+          <p:cNvPr id="42" name="TextBox 41"/>
+          <p:cNvSpPr txBox="1"/>
+          <p:nvPr/>
+        </p:nvSpPr>
+        <p:spPr>
+          <a:xfrm>
+            <a:off x="-2614612" y="14792325"/>
+            <a:ext cx="17373600" cy="161925"/>
+          </a:xfrm>
+          <a:prstGeom prst="rect">
+            <a:avLst/>
+          </a:prstGeom>
+          <a:noFill/>
+        </p:spPr>
+        <p:txBody>
+          <a:bodyPr wrap="none" anchor="t" lIns="0" rIns="0" tIns="0" bIns="0"/>
+          <a:lstStyle/>
+          <a:p>
+            <a:pPr algn="ctr"/>
+            <a:r>
+              <a:rPr sz="825" i="0" b="0" spc="198">
+                <a:solidFill>
+                  <a:srgbClr val="8A867E"/>
+                </a:solidFill>
+                <a:latin typeface="Poppins"/>
+                <a:ea typeface="Poppins"/>
+                <a:cs typeface="Poppins"/>
+              </a:rPr>
+              <a:t>(512) 555-0147 · HELLO@MAYAELLISON.COM · MAYAELLISON.COM</a:t>
+            </a:r>
+          </a:p>
+        </p:txBody>
+      </p:sp>
     </p:spTree>
   </p:cSld>
   <p:clrMapOvr>

--- a/bright-32-feature-sheet.pptx
+++ b/bright-32-feature-sheet.pptx
@@ -3184,14 +3184,14 @@
         </p:nvSpPr>
         <p:spPr>
           <a:xfrm>
-            <a:off x="762000" y="1752600"/>
-            <a:ext cx="10620375" cy="4953000"/>
+            <a:off x="762000" y="10163175"/>
+            <a:ext cx="10620375" cy="9525"/>
           </a:xfrm>
           <a:prstGeom prst="rect">
             <a:avLst/>
           </a:prstGeom>
           <a:solidFill>
-            <a:srgbClr val="EDE7DD"/>
+            <a:srgbClr val="C9D2C2"/>
           </a:solidFill>
           <a:ln>
             <a:noFill/>
@@ -3228,14 +3228,14 @@
         </p:nvSpPr>
         <p:spPr>
           <a:xfrm>
-            <a:off x="762000" y="1752600"/>
+            <a:off x="762000" y="10763250"/>
             <a:ext cx="10620375" cy="9525"/>
           </a:xfrm>
           <a:prstGeom prst="rect">
             <a:avLst/>
           </a:prstGeom>
           <a:solidFill>
-            <a:srgbClr val="CED6C7"/>
+            <a:srgbClr val="C9D2C2"/>
           </a:solidFill>
           <a:ln>
             <a:noFill/>
@@ -3272,14 +3272,14 @@
         </p:nvSpPr>
         <p:spPr>
           <a:xfrm>
-            <a:off x="762000" y="6696075"/>
+            <a:off x="762000" y="14573250"/>
             <a:ext cx="10620375" cy="9525"/>
           </a:xfrm>
           <a:prstGeom prst="rect">
             <a:avLst/>
           </a:prstGeom>
           <a:solidFill>
-            <a:srgbClr val="CED6C7"/>
+            <a:srgbClr val="C9D2C2"/>
           </a:solidFill>
           <a:ln>
             <a:noFill/>
@@ -3310,887 +3310,7 @@
       </p:sp>
       <p:sp>
         <p:nvSpPr>
-          <p:cNvPr id="7" name="Rectangle 6"/>
-          <p:cNvSpPr/>
-          <p:nvPr/>
-        </p:nvSpPr>
-        <p:spPr>
-          <a:xfrm>
-            <a:off x="762000" y="1752600"/>
-            <a:ext cx="9525" cy="4953000"/>
-          </a:xfrm>
-          <a:prstGeom prst="rect">
-            <a:avLst/>
-          </a:prstGeom>
-          <a:solidFill>
-            <a:srgbClr val="CED6C7"/>
-          </a:solidFill>
-          <a:ln>
-            <a:noFill/>
-          </a:ln>
-          <a:effectLst/>
-        </p:spPr>
-        <p:style>
-          <a:lnRef idx="1">
-            <a:schemeClr val="accent1"/>
-          </a:lnRef>
-          <a:fillRef idx="3">
-            <a:schemeClr val="accent1"/>
-          </a:fillRef>
-          <a:effectRef idx="2">
-            <a:schemeClr val="accent1"/>
-          </a:effectRef>
-          <a:fontRef idx="minor">
-            <a:schemeClr val="lt1"/>
-          </a:fontRef>
-        </p:style>
-        <p:txBody>
-          <a:bodyPr rtlCol="0" anchor="ctr"/>
-          <a:lstStyle/>
-          <a:p>
-            <a:pPr algn="ctr"/>
-          </a:p>
-        </p:txBody>
-      </p:sp>
-      <p:sp>
-        <p:nvSpPr>
-          <p:cNvPr id="8" name="Rectangle 7"/>
-          <p:cNvSpPr/>
-          <p:nvPr/>
-        </p:nvSpPr>
-        <p:spPr>
-          <a:xfrm>
-            <a:off x="11372850" y="1752600"/>
-            <a:ext cx="9525" cy="4953000"/>
-          </a:xfrm>
-          <a:prstGeom prst="rect">
-            <a:avLst/>
-          </a:prstGeom>
-          <a:solidFill>
-            <a:srgbClr val="CED6C7"/>
-          </a:solidFill>
-          <a:ln>
-            <a:noFill/>
-          </a:ln>
-          <a:effectLst/>
-        </p:spPr>
-        <p:style>
-          <a:lnRef idx="1">
-            <a:schemeClr val="accent1"/>
-          </a:lnRef>
-          <a:fillRef idx="3">
-            <a:schemeClr val="accent1"/>
-          </a:fillRef>
-          <a:effectRef idx="2">
-            <a:schemeClr val="accent1"/>
-          </a:effectRef>
-          <a:fontRef idx="minor">
-            <a:schemeClr val="lt1"/>
-          </a:fontRef>
-        </p:style>
-        <p:txBody>
-          <a:bodyPr rtlCol="0" anchor="ctr"/>
-          <a:lstStyle/>
-          <a:p>
-            <a:pPr algn="ctr"/>
-          </a:p>
-        </p:txBody>
-      </p:sp>
-      <p:sp>
-        <p:nvSpPr>
-          <p:cNvPr id="9" name="Rectangle 8"/>
-          <p:cNvSpPr/>
-          <p:nvPr/>
-        </p:nvSpPr>
-        <p:spPr>
-          <a:xfrm>
-            <a:off x="762000" y="6934200"/>
-            <a:ext cx="3387626" cy="1905000"/>
-          </a:xfrm>
-          <a:prstGeom prst="rect">
-            <a:avLst/>
-          </a:prstGeom>
-          <a:solidFill>
-            <a:srgbClr val="EDE7DD"/>
-          </a:solidFill>
-          <a:ln>
-            <a:noFill/>
-          </a:ln>
-          <a:effectLst/>
-        </p:spPr>
-        <p:style>
-          <a:lnRef idx="1">
-            <a:schemeClr val="accent1"/>
-          </a:lnRef>
-          <a:fillRef idx="3">
-            <a:schemeClr val="accent1"/>
-          </a:fillRef>
-          <a:effectRef idx="2">
-            <a:schemeClr val="accent1"/>
-          </a:effectRef>
-          <a:fontRef idx="minor">
-            <a:schemeClr val="lt1"/>
-          </a:fontRef>
-        </p:style>
-        <p:txBody>
-          <a:bodyPr rtlCol="0" anchor="ctr"/>
-          <a:lstStyle/>
-          <a:p>
-            <a:pPr algn="ctr"/>
-          </a:p>
-        </p:txBody>
-      </p:sp>
-      <p:sp>
-        <p:nvSpPr>
-          <p:cNvPr id="10" name="Rectangle 9"/>
-          <p:cNvSpPr/>
-          <p:nvPr/>
-        </p:nvSpPr>
-        <p:spPr>
-          <a:xfrm>
-            <a:off x="762000" y="6934200"/>
-            <a:ext cx="3387626" cy="9525"/>
-          </a:xfrm>
-          <a:prstGeom prst="rect">
-            <a:avLst/>
-          </a:prstGeom>
-          <a:solidFill>
-            <a:srgbClr val="CED6C7"/>
-          </a:solidFill>
-          <a:ln>
-            <a:noFill/>
-          </a:ln>
-          <a:effectLst/>
-        </p:spPr>
-        <p:style>
-          <a:lnRef idx="1">
-            <a:schemeClr val="accent1"/>
-          </a:lnRef>
-          <a:fillRef idx="3">
-            <a:schemeClr val="accent1"/>
-          </a:fillRef>
-          <a:effectRef idx="2">
-            <a:schemeClr val="accent1"/>
-          </a:effectRef>
-          <a:fontRef idx="minor">
-            <a:schemeClr val="lt1"/>
-          </a:fontRef>
-        </p:style>
-        <p:txBody>
-          <a:bodyPr rtlCol="0" anchor="ctr"/>
-          <a:lstStyle/>
-          <a:p>
-            <a:pPr algn="ctr"/>
-          </a:p>
-        </p:txBody>
-      </p:sp>
-      <p:sp>
-        <p:nvSpPr>
-          <p:cNvPr id="11" name="Rectangle 10"/>
-          <p:cNvSpPr/>
-          <p:nvPr/>
-        </p:nvSpPr>
-        <p:spPr>
-          <a:xfrm>
-            <a:off x="762000" y="8829675"/>
-            <a:ext cx="3387626" cy="9525"/>
-          </a:xfrm>
-          <a:prstGeom prst="rect">
-            <a:avLst/>
-          </a:prstGeom>
-          <a:solidFill>
-            <a:srgbClr val="CED6C7"/>
-          </a:solidFill>
-          <a:ln>
-            <a:noFill/>
-          </a:ln>
-          <a:effectLst/>
-        </p:spPr>
-        <p:style>
-          <a:lnRef idx="1">
-            <a:schemeClr val="accent1"/>
-          </a:lnRef>
-          <a:fillRef idx="3">
-            <a:schemeClr val="accent1"/>
-          </a:fillRef>
-          <a:effectRef idx="2">
-            <a:schemeClr val="accent1"/>
-          </a:effectRef>
-          <a:fontRef idx="minor">
-            <a:schemeClr val="lt1"/>
-          </a:fontRef>
-        </p:style>
-        <p:txBody>
-          <a:bodyPr rtlCol="0" anchor="ctr"/>
-          <a:lstStyle/>
-          <a:p>
-            <a:pPr algn="ctr"/>
-          </a:p>
-        </p:txBody>
-      </p:sp>
-      <p:sp>
-        <p:nvSpPr>
-          <p:cNvPr id="12" name="Rectangle 11"/>
-          <p:cNvSpPr/>
-          <p:nvPr/>
-        </p:nvSpPr>
-        <p:spPr>
-          <a:xfrm>
-            <a:off x="762000" y="6934200"/>
-            <a:ext cx="9525" cy="1905000"/>
-          </a:xfrm>
-          <a:prstGeom prst="rect">
-            <a:avLst/>
-          </a:prstGeom>
-          <a:solidFill>
-            <a:srgbClr val="CED6C7"/>
-          </a:solidFill>
-          <a:ln>
-            <a:noFill/>
-          </a:ln>
-          <a:effectLst/>
-        </p:spPr>
-        <p:style>
-          <a:lnRef idx="1">
-            <a:schemeClr val="accent1"/>
-          </a:lnRef>
-          <a:fillRef idx="3">
-            <a:schemeClr val="accent1"/>
-          </a:fillRef>
-          <a:effectRef idx="2">
-            <a:schemeClr val="accent1"/>
-          </a:effectRef>
-          <a:fontRef idx="minor">
-            <a:schemeClr val="lt1"/>
-          </a:fontRef>
-        </p:style>
-        <p:txBody>
-          <a:bodyPr rtlCol="0" anchor="ctr"/>
-          <a:lstStyle/>
-          <a:p>
-            <a:pPr algn="ctr"/>
-          </a:p>
-        </p:txBody>
-      </p:sp>
-      <p:sp>
-        <p:nvSpPr>
-          <p:cNvPr id="13" name="Rectangle 12"/>
-          <p:cNvSpPr/>
-          <p:nvPr/>
-        </p:nvSpPr>
-        <p:spPr>
-          <a:xfrm>
-            <a:off x="4140101" y="6934200"/>
-            <a:ext cx="9525" cy="1905000"/>
-          </a:xfrm>
-          <a:prstGeom prst="rect">
-            <a:avLst/>
-          </a:prstGeom>
-          <a:solidFill>
-            <a:srgbClr val="CED6C7"/>
-          </a:solidFill>
-          <a:ln>
-            <a:noFill/>
-          </a:ln>
-          <a:effectLst/>
-        </p:spPr>
-        <p:style>
-          <a:lnRef idx="1">
-            <a:schemeClr val="accent1"/>
-          </a:lnRef>
-          <a:fillRef idx="3">
-            <a:schemeClr val="accent1"/>
-          </a:fillRef>
-          <a:effectRef idx="2">
-            <a:schemeClr val="accent1"/>
-          </a:effectRef>
-          <a:fontRef idx="minor">
-            <a:schemeClr val="lt1"/>
-          </a:fontRef>
-        </p:style>
-        <p:txBody>
-          <a:bodyPr rtlCol="0" anchor="ctr"/>
-          <a:lstStyle/>
-          <a:p>
-            <a:pPr algn="ctr"/>
-          </a:p>
-        </p:txBody>
-      </p:sp>
-      <p:sp>
-        <p:nvSpPr>
-          <p:cNvPr id="14" name="Rectangle 13"/>
-          <p:cNvSpPr/>
-          <p:nvPr/>
-        </p:nvSpPr>
-        <p:spPr>
-          <a:xfrm>
-            <a:off x="4378226" y="6934200"/>
-            <a:ext cx="3387775" cy="1905000"/>
-          </a:xfrm>
-          <a:prstGeom prst="rect">
-            <a:avLst/>
-          </a:prstGeom>
-          <a:solidFill>
-            <a:srgbClr val="EDE7DD"/>
-          </a:solidFill>
-          <a:ln>
-            <a:noFill/>
-          </a:ln>
-          <a:effectLst/>
-        </p:spPr>
-        <p:style>
-          <a:lnRef idx="1">
-            <a:schemeClr val="accent1"/>
-          </a:lnRef>
-          <a:fillRef idx="3">
-            <a:schemeClr val="accent1"/>
-          </a:fillRef>
-          <a:effectRef idx="2">
-            <a:schemeClr val="accent1"/>
-          </a:effectRef>
-          <a:fontRef idx="minor">
-            <a:schemeClr val="lt1"/>
-          </a:fontRef>
-        </p:style>
-        <p:txBody>
-          <a:bodyPr rtlCol="0" anchor="ctr"/>
-          <a:lstStyle/>
-          <a:p>
-            <a:pPr algn="ctr"/>
-          </a:p>
-        </p:txBody>
-      </p:sp>
-      <p:sp>
-        <p:nvSpPr>
-          <p:cNvPr id="15" name="Rectangle 14"/>
-          <p:cNvSpPr/>
-          <p:nvPr/>
-        </p:nvSpPr>
-        <p:spPr>
-          <a:xfrm>
-            <a:off x="4378226" y="6934200"/>
-            <a:ext cx="3387775" cy="9525"/>
-          </a:xfrm>
-          <a:prstGeom prst="rect">
-            <a:avLst/>
-          </a:prstGeom>
-          <a:solidFill>
-            <a:srgbClr val="CED6C7"/>
-          </a:solidFill>
-          <a:ln>
-            <a:noFill/>
-          </a:ln>
-          <a:effectLst/>
-        </p:spPr>
-        <p:style>
-          <a:lnRef idx="1">
-            <a:schemeClr val="accent1"/>
-          </a:lnRef>
-          <a:fillRef idx="3">
-            <a:schemeClr val="accent1"/>
-          </a:fillRef>
-          <a:effectRef idx="2">
-            <a:schemeClr val="accent1"/>
-          </a:effectRef>
-          <a:fontRef idx="minor">
-            <a:schemeClr val="lt1"/>
-          </a:fontRef>
-        </p:style>
-        <p:txBody>
-          <a:bodyPr rtlCol="0" anchor="ctr"/>
-          <a:lstStyle/>
-          <a:p>
-            <a:pPr algn="ctr"/>
-          </a:p>
-        </p:txBody>
-      </p:sp>
-      <p:sp>
-        <p:nvSpPr>
-          <p:cNvPr id="16" name="Rectangle 15"/>
-          <p:cNvSpPr/>
-          <p:nvPr/>
-        </p:nvSpPr>
-        <p:spPr>
-          <a:xfrm>
-            <a:off x="4378226" y="8829675"/>
-            <a:ext cx="3387775" cy="9525"/>
-          </a:xfrm>
-          <a:prstGeom prst="rect">
-            <a:avLst/>
-          </a:prstGeom>
-          <a:solidFill>
-            <a:srgbClr val="CED6C7"/>
-          </a:solidFill>
-          <a:ln>
-            <a:noFill/>
-          </a:ln>
-          <a:effectLst/>
-        </p:spPr>
-        <p:style>
-          <a:lnRef idx="1">
-            <a:schemeClr val="accent1"/>
-          </a:lnRef>
-          <a:fillRef idx="3">
-            <a:schemeClr val="accent1"/>
-          </a:fillRef>
-          <a:effectRef idx="2">
-            <a:schemeClr val="accent1"/>
-          </a:effectRef>
-          <a:fontRef idx="minor">
-            <a:schemeClr val="lt1"/>
-          </a:fontRef>
-        </p:style>
-        <p:txBody>
-          <a:bodyPr rtlCol="0" anchor="ctr"/>
-          <a:lstStyle/>
-          <a:p>
-            <a:pPr algn="ctr"/>
-          </a:p>
-        </p:txBody>
-      </p:sp>
-      <p:sp>
-        <p:nvSpPr>
-          <p:cNvPr id="17" name="Rectangle 16"/>
-          <p:cNvSpPr/>
-          <p:nvPr/>
-        </p:nvSpPr>
-        <p:spPr>
-          <a:xfrm>
-            <a:off x="4378226" y="6934200"/>
-            <a:ext cx="9525" cy="1905000"/>
-          </a:xfrm>
-          <a:prstGeom prst="rect">
-            <a:avLst/>
-          </a:prstGeom>
-          <a:solidFill>
-            <a:srgbClr val="CED6C7"/>
-          </a:solidFill>
-          <a:ln>
-            <a:noFill/>
-          </a:ln>
-          <a:effectLst/>
-        </p:spPr>
-        <p:style>
-          <a:lnRef idx="1">
-            <a:schemeClr val="accent1"/>
-          </a:lnRef>
-          <a:fillRef idx="3">
-            <a:schemeClr val="accent1"/>
-          </a:fillRef>
-          <a:effectRef idx="2">
-            <a:schemeClr val="accent1"/>
-          </a:effectRef>
-          <a:fontRef idx="minor">
-            <a:schemeClr val="lt1"/>
-          </a:fontRef>
-        </p:style>
-        <p:txBody>
-          <a:bodyPr rtlCol="0" anchor="ctr"/>
-          <a:lstStyle/>
-          <a:p>
-            <a:pPr algn="ctr"/>
-          </a:p>
-        </p:txBody>
-      </p:sp>
-      <p:sp>
-        <p:nvSpPr>
-          <p:cNvPr id="18" name="Rectangle 17"/>
-          <p:cNvSpPr/>
-          <p:nvPr/>
-        </p:nvSpPr>
-        <p:spPr>
-          <a:xfrm>
-            <a:off x="7756475" y="6934200"/>
-            <a:ext cx="9525" cy="1905000"/>
-          </a:xfrm>
-          <a:prstGeom prst="rect">
-            <a:avLst/>
-          </a:prstGeom>
-          <a:solidFill>
-            <a:srgbClr val="CED6C7"/>
-          </a:solidFill>
-          <a:ln>
-            <a:noFill/>
-          </a:ln>
-          <a:effectLst/>
-        </p:spPr>
-        <p:style>
-          <a:lnRef idx="1">
-            <a:schemeClr val="accent1"/>
-          </a:lnRef>
-          <a:fillRef idx="3">
-            <a:schemeClr val="accent1"/>
-          </a:fillRef>
-          <a:effectRef idx="2">
-            <a:schemeClr val="accent1"/>
-          </a:effectRef>
-          <a:fontRef idx="minor">
-            <a:schemeClr val="lt1"/>
-          </a:fontRef>
-        </p:style>
-        <p:txBody>
-          <a:bodyPr rtlCol="0" anchor="ctr"/>
-          <a:lstStyle/>
-          <a:p>
-            <a:pPr algn="ctr"/>
-          </a:p>
-        </p:txBody>
-      </p:sp>
-      <p:sp>
-        <p:nvSpPr>
-          <p:cNvPr id="19" name="Rectangle 18"/>
-          <p:cNvSpPr/>
-          <p:nvPr/>
-        </p:nvSpPr>
-        <p:spPr>
-          <a:xfrm>
-            <a:off x="7994600" y="6934200"/>
-            <a:ext cx="3387775" cy="1905000"/>
-          </a:xfrm>
-          <a:prstGeom prst="rect">
-            <a:avLst/>
-          </a:prstGeom>
-          <a:solidFill>
-            <a:srgbClr val="EDE7DD"/>
-          </a:solidFill>
-          <a:ln>
-            <a:noFill/>
-          </a:ln>
-          <a:effectLst/>
-        </p:spPr>
-        <p:style>
-          <a:lnRef idx="1">
-            <a:schemeClr val="accent1"/>
-          </a:lnRef>
-          <a:fillRef idx="3">
-            <a:schemeClr val="accent1"/>
-          </a:fillRef>
-          <a:effectRef idx="2">
-            <a:schemeClr val="accent1"/>
-          </a:effectRef>
-          <a:fontRef idx="minor">
-            <a:schemeClr val="lt1"/>
-          </a:fontRef>
-        </p:style>
-        <p:txBody>
-          <a:bodyPr rtlCol="0" anchor="ctr"/>
-          <a:lstStyle/>
-          <a:p>
-            <a:pPr algn="ctr"/>
-          </a:p>
-        </p:txBody>
-      </p:sp>
-      <p:sp>
-        <p:nvSpPr>
-          <p:cNvPr id="20" name="Rectangle 19"/>
-          <p:cNvSpPr/>
-          <p:nvPr/>
-        </p:nvSpPr>
-        <p:spPr>
-          <a:xfrm>
-            <a:off x="7994600" y="6934200"/>
-            <a:ext cx="3387775" cy="9525"/>
-          </a:xfrm>
-          <a:prstGeom prst="rect">
-            <a:avLst/>
-          </a:prstGeom>
-          <a:solidFill>
-            <a:srgbClr val="CED6C7"/>
-          </a:solidFill>
-          <a:ln>
-            <a:noFill/>
-          </a:ln>
-          <a:effectLst/>
-        </p:spPr>
-        <p:style>
-          <a:lnRef idx="1">
-            <a:schemeClr val="accent1"/>
-          </a:lnRef>
-          <a:fillRef idx="3">
-            <a:schemeClr val="accent1"/>
-          </a:fillRef>
-          <a:effectRef idx="2">
-            <a:schemeClr val="accent1"/>
-          </a:effectRef>
-          <a:fontRef idx="minor">
-            <a:schemeClr val="lt1"/>
-          </a:fontRef>
-        </p:style>
-        <p:txBody>
-          <a:bodyPr rtlCol="0" anchor="ctr"/>
-          <a:lstStyle/>
-          <a:p>
-            <a:pPr algn="ctr"/>
-          </a:p>
-        </p:txBody>
-      </p:sp>
-      <p:sp>
-        <p:nvSpPr>
-          <p:cNvPr id="21" name="Rectangle 20"/>
-          <p:cNvSpPr/>
-          <p:nvPr/>
-        </p:nvSpPr>
-        <p:spPr>
-          <a:xfrm>
-            <a:off x="7994600" y="8829675"/>
-            <a:ext cx="3387775" cy="9525"/>
-          </a:xfrm>
-          <a:prstGeom prst="rect">
-            <a:avLst/>
-          </a:prstGeom>
-          <a:solidFill>
-            <a:srgbClr val="CED6C7"/>
-          </a:solidFill>
-          <a:ln>
-            <a:noFill/>
-          </a:ln>
-          <a:effectLst/>
-        </p:spPr>
-        <p:style>
-          <a:lnRef idx="1">
-            <a:schemeClr val="accent1"/>
-          </a:lnRef>
-          <a:fillRef idx="3">
-            <a:schemeClr val="accent1"/>
-          </a:fillRef>
-          <a:effectRef idx="2">
-            <a:schemeClr val="accent1"/>
-          </a:effectRef>
-          <a:fontRef idx="minor">
-            <a:schemeClr val="lt1"/>
-          </a:fontRef>
-        </p:style>
-        <p:txBody>
-          <a:bodyPr rtlCol="0" anchor="ctr"/>
-          <a:lstStyle/>
-          <a:p>
-            <a:pPr algn="ctr"/>
-          </a:p>
-        </p:txBody>
-      </p:sp>
-      <p:sp>
-        <p:nvSpPr>
-          <p:cNvPr id="22" name="Rectangle 21"/>
-          <p:cNvSpPr/>
-          <p:nvPr/>
-        </p:nvSpPr>
-        <p:spPr>
-          <a:xfrm>
-            <a:off x="7994600" y="6934200"/>
-            <a:ext cx="9525" cy="1905000"/>
-          </a:xfrm>
-          <a:prstGeom prst="rect">
-            <a:avLst/>
-          </a:prstGeom>
-          <a:solidFill>
-            <a:srgbClr val="CED6C7"/>
-          </a:solidFill>
-          <a:ln>
-            <a:noFill/>
-          </a:ln>
-          <a:effectLst/>
-        </p:spPr>
-        <p:style>
-          <a:lnRef idx="1">
-            <a:schemeClr val="accent1"/>
-          </a:lnRef>
-          <a:fillRef idx="3">
-            <a:schemeClr val="accent1"/>
-          </a:fillRef>
-          <a:effectRef idx="2">
-            <a:schemeClr val="accent1"/>
-          </a:effectRef>
-          <a:fontRef idx="minor">
-            <a:schemeClr val="lt1"/>
-          </a:fontRef>
-        </p:style>
-        <p:txBody>
-          <a:bodyPr rtlCol="0" anchor="ctr"/>
-          <a:lstStyle/>
-          <a:p>
-            <a:pPr algn="ctr"/>
-          </a:p>
-        </p:txBody>
-      </p:sp>
-      <p:sp>
-        <p:nvSpPr>
-          <p:cNvPr id="23" name="Rectangle 22"/>
-          <p:cNvSpPr/>
-          <p:nvPr/>
-        </p:nvSpPr>
-        <p:spPr>
-          <a:xfrm>
-            <a:off x="11372850" y="6934200"/>
-            <a:ext cx="9525" cy="1905000"/>
-          </a:xfrm>
-          <a:prstGeom prst="rect">
-            <a:avLst/>
-          </a:prstGeom>
-          <a:solidFill>
-            <a:srgbClr val="CED6C7"/>
-          </a:solidFill>
-          <a:ln>
-            <a:noFill/>
-          </a:ln>
-          <a:effectLst/>
-        </p:spPr>
-        <p:style>
-          <a:lnRef idx="1">
-            <a:schemeClr val="accent1"/>
-          </a:lnRef>
-          <a:fillRef idx="3">
-            <a:schemeClr val="accent1"/>
-          </a:fillRef>
-          <a:effectRef idx="2">
-            <a:schemeClr val="accent1"/>
-          </a:effectRef>
-          <a:fontRef idx="minor">
-            <a:schemeClr val="lt1"/>
-          </a:fontRef>
-        </p:style>
-        <p:txBody>
-          <a:bodyPr rtlCol="0" anchor="ctr"/>
-          <a:lstStyle/>
-          <a:p>
-            <a:pPr algn="ctr"/>
-          </a:p>
-        </p:txBody>
-      </p:sp>
-      <p:sp>
-        <p:nvSpPr>
-          <p:cNvPr id="24" name="Rectangle 23"/>
-          <p:cNvSpPr/>
-          <p:nvPr/>
-        </p:nvSpPr>
-        <p:spPr>
-          <a:xfrm>
-            <a:off x="762000" y="10163175"/>
-            <a:ext cx="10620375" cy="9525"/>
-          </a:xfrm>
-          <a:prstGeom prst="rect">
-            <a:avLst/>
-          </a:prstGeom>
-          <a:solidFill>
-            <a:srgbClr val="C9D2C2"/>
-          </a:solidFill>
-          <a:ln>
-            <a:noFill/>
-          </a:ln>
-          <a:effectLst/>
-        </p:spPr>
-        <p:style>
-          <a:lnRef idx="1">
-            <a:schemeClr val="accent1"/>
-          </a:lnRef>
-          <a:fillRef idx="3">
-            <a:schemeClr val="accent1"/>
-          </a:fillRef>
-          <a:effectRef idx="2">
-            <a:schemeClr val="accent1"/>
-          </a:effectRef>
-          <a:fontRef idx="minor">
-            <a:schemeClr val="lt1"/>
-          </a:fontRef>
-        </p:style>
-        <p:txBody>
-          <a:bodyPr rtlCol="0" anchor="ctr"/>
-          <a:lstStyle/>
-          <a:p>
-            <a:pPr algn="ctr"/>
-          </a:p>
-        </p:txBody>
-      </p:sp>
-      <p:sp>
-        <p:nvSpPr>
-          <p:cNvPr id="25" name="Rectangle 24"/>
-          <p:cNvSpPr/>
-          <p:nvPr/>
-        </p:nvSpPr>
-        <p:spPr>
-          <a:xfrm>
-            <a:off x="762000" y="10763250"/>
-            <a:ext cx="10620375" cy="9525"/>
-          </a:xfrm>
-          <a:prstGeom prst="rect">
-            <a:avLst/>
-          </a:prstGeom>
-          <a:solidFill>
-            <a:srgbClr val="C9D2C2"/>
-          </a:solidFill>
-          <a:ln>
-            <a:noFill/>
-          </a:ln>
-          <a:effectLst/>
-        </p:spPr>
-        <p:style>
-          <a:lnRef idx="1">
-            <a:schemeClr val="accent1"/>
-          </a:lnRef>
-          <a:fillRef idx="3">
-            <a:schemeClr val="accent1"/>
-          </a:fillRef>
-          <a:effectRef idx="2">
-            <a:schemeClr val="accent1"/>
-          </a:effectRef>
-          <a:fontRef idx="minor">
-            <a:schemeClr val="lt1"/>
-          </a:fontRef>
-        </p:style>
-        <p:txBody>
-          <a:bodyPr rtlCol="0" anchor="ctr"/>
-          <a:lstStyle/>
-          <a:p>
-            <a:pPr algn="ctr"/>
-          </a:p>
-        </p:txBody>
-      </p:sp>
-      <p:sp>
-        <p:nvSpPr>
-          <p:cNvPr id="26" name="Rectangle 25"/>
-          <p:cNvSpPr/>
-          <p:nvPr/>
-        </p:nvSpPr>
-        <p:spPr>
-          <a:xfrm>
-            <a:off x="762000" y="14573250"/>
-            <a:ext cx="10620375" cy="9525"/>
-          </a:xfrm>
-          <a:prstGeom prst="rect">
-            <a:avLst/>
-          </a:prstGeom>
-          <a:solidFill>
-            <a:srgbClr val="C9D2C2"/>
-          </a:solidFill>
-          <a:ln>
-            <a:noFill/>
-          </a:ln>
-          <a:effectLst/>
-        </p:spPr>
-        <p:style>
-          <a:lnRef idx="1">
-            <a:schemeClr val="accent1"/>
-          </a:lnRef>
-          <a:fillRef idx="3">
-            <a:schemeClr val="accent1"/>
-          </a:fillRef>
-          <a:effectRef idx="2">
-            <a:schemeClr val="accent1"/>
-          </a:effectRef>
-          <a:fontRef idx="minor">
-            <a:schemeClr val="lt1"/>
-          </a:fontRef>
-        </p:style>
-        <p:txBody>
-          <a:bodyPr rtlCol="0" anchor="ctr"/>
-          <a:lstStyle/>
-          <a:p>
-            <a:pPr algn="ctr"/>
-          </a:p>
-        </p:txBody>
-      </p:sp>
-      <p:sp>
-        <p:nvSpPr>
-          <p:cNvPr id="27" name="TextBox 26"/>
+          <p:cNvPr id="7" name="TextBox 6"/>
           <p:cNvSpPr txBox="1"/>
           <p:nvPr/>
         </p:nvSpPr>
@@ -4225,7 +3345,7 @@
       </p:sp>
       <p:sp>
         <p:nvSpPr>
-          <p:cNvPr id="28" name="TextBox 27"/>
+          <p:cNvPr id="8" name="TextBox 7"/>
           <p:cNvSpPr txBox="1"/>
           <p:nvPr/>
         </p:nvSpPr>
@@ -4260,147 +3380,7 @@
       </p:sp>
       <p:sp>
         <p:nvSpPr>
-          <p:cNvPr id="29" name="TextBox 28"/>
-          <p:cNvSpPr txBox="1"/>
-          <p:nvPr/>
-        </p:nvSpPr>
-        <p:spPr>
-          <a:xfrm>
-            <a:off x="5550098" y="4143375"/>
-            <a:ext cx="2051685" cy="171450"/>
-          </a:xfrm>
-          <a:prstGeom prst="rect">
-            <a:avLst/>
-          </a:prstGeom>
-          <a:noFill/>
-        </p:spPr>
-        <p:txBody>
-          <a:bodyPr wrap="none" anchor="t" lIns="0" rIns="0" tIns="0" bIns="0"/>
-          <a:lstStyle/>
-          <a:p>
-            <a:pPr algn="l"/>
-            <a:r>
-              <a:rPr sz="900" i="0" b="0" spc="270">
-                <a:solidFill>
-                  <a:srgbClr val="8A867E"/>
-                </a:solidFill>
-                <a:latin typeface="Poppins"/>
-                <a:ea typeface="Poppins"/>
-                <a:cs typeface="Poppins"/>
-              </a:rPr>
-              <a:t>MAIN PHOTO</a:t>
-            </a:r>
-          </a:p>
-        </p:txBody>
-      </p:sp>
-      <p:sp>
-        <p:nvSpPr>
-          <p:cNvPr id="30" name="TextBox 29"/>
-          <p:cNvSpPr txBox="1"/>
-          <p:nvPr/>
-        </p:nvSpPr>
-        <p:spPr>
-          <a:xfrm>
-            <a:off x="2176611" y="7800975"/>
-            <a:ext cx="1274207" cy="171450"/>
-          </a:xfrm>
-          <a:prstGeom prst="rect">
-            <a:avLst/>
-          </a:prstGeom>
-          <a:noFill/>
-        </p:spPr>
-        <p:txBody>
-          <a:bodyPr wrap="none" anchor="t" lIns="0" rIns="0" tIns="0" bIns="0"/>
-          <a:lstStyle/>
-          <a:p>
-            <a:pPr algn="l"/>
-            <a:r>
-              <a:rPr sz="900" i="0" b="0" spc="270">
-                <a:solidFill>
-                  <a:srgbClr val="8A867E"/>
-                </a:solidFill>
-                <a:latin typeface="Poppins"/>
-                <a:ea typeface="Poppins"/>
-                <a:cs typeface="Poppins"/>
-              </a:rPr>
-              <a:t>PHOTO</a:t>
-            </a:r>
-          </a:p>
-        </p:txBody>
-      </p:sp>
-      <p:sp>
-        <p:nvSpPr>
-          <p:cNvPr id="31" name="TextBox 30"/>
-          <p:cNvSpPr txBox="1"/>
-          <p:nvPr/>
-        </p:nvSpPr>
-        <p:spPr>
-          <a:xfrm>
-            <a:off x="5792986" y="7800975"/>
-            <a:ext cx="1274207" cy="171450"/>
-          </a:xfrm>
-          <a:prstGeom prst="rect">
-            <a:avLst/>
-          </a:prstGeom>
-          <a:noFill/>
-        </p:spPr>
-        <p:txBody>
-          <a:bodyPr wrap="none" anchor="t" lIns="0" rIns="0" tIns="0" bIns="0"/>
-          <a:lstStyle/>
-          <a:p>
-            <a:pPr algn="l"/>
-            <a:r>
-              <a:rPr sz="900" i="0" b="0" spc="270">
-                <a:solidFill>
-                  <a:srgbClr val="8A867E"/>
-                </a:solidFill>
-                <a:latin typeface="Poppins"/>
-                <a:ea typeface="Poppins"/>
-                <a:cs typeface="Poppins"/>
-              </a:rPr>
-              <a:t>PHOTO</a:t>
-            </a:r>
-          </a:p>
-        </p:txBody>
-      </p:sp>
-      <p:sp>
-        <p:nvSpPr>
-          <p:cNvPr id="32" name="TextBox 31"/>
-          <p:cNvSpPr txBox="1"/>
-          <p:nvPr/>
-        </p:nvSpPr>
-        <p:spPr>
-          <a:xfrm>
-            <a:off x="9409361" y="7800975"/>
-            <a:ext cx="1274207" cy="171450"/>
-          </a:xfrm>
-          <a:prstGeom prst="rect">
-            <a:avLst/>
-          </a:prstGeom>
-          <a:noFill/>
-        </p:spPr>
-        <p:txBody>
-          <a:bodyPr wrap="none" anchor="t" lIns="0" rIns="0" tIns="0" bIns="0"/>
-          <a:lstStyle/>
-          <a:p>
-            <a:pPr algn="l"/>
-            <a:r>
-              <a:rPr sz="900" i="0" b="0" spc="270">
-                <a:solidFill>
-                  <a:srgbClr val="8A867E"/>
-                </a:solidFill>
-                <a:latin typeface="Poppins"/>
-                <a:ea typeface="Poppins"/>
-                <a:cs typeface="Poppins"/>
-              </a:rPr>
-              <a:t>PHOTO</a:t>
-            </a:r>
-          </a:p>
-        </p:txBody>
-      </p:sp>
-      <p:sp>
-        <p:nvSpPr>
-          <p:cNvPr id="33" name="TextBox 32"/>
+          <p:cNvPr id="9" name="TextBox 8"/>
           <p:cNvSpPr txBox="1"/>
           <p:nvPr/>
         </p:nvSpPr>
@@ -4435,7 +3415,7 @@
       </p:sp>
       <p:sp>
         <p:nvSpPr>
-          <p:cNvPr id="34" name="TextBox 33"/>
+          <p:cNvPr id="10" name="TextBox 9"/>
           <p:cNvSpPr txBox="1"/>
           <p:nvPr/>
         </p:nvSpPr>
@@ -4470,7 +3450,7 @@
       </p:sp>
       <p:sp>
         <p:nvSpPr>
-          <p:cNvPr id="35" name="TextBox 34"/>
+          <p:cNvPr id="11" name="TextBox 10"/>
           <p:cNvSpPr txBox="1"/>
           <p:nvPr/>
         </p:nvSpPr>
@@ -4505,7 +3485,7 @@
       </p:sp>
       <p:sp>
         <p:nvSpPr>
-          <p:cNvPr id="36" name="TextBox 35"/>
+          <p:cNvPr id="12" name="TextBox 11"/>
           <p:cNvSpPr txBox="1"/>
           <p:nvPr/>
         </p:nvSpPr>
@@ -4540,7 +3520,7 @@
       </p:sp>
       <p:sp>
         <p:nvSpPr>
-          <p:cNvPr id="37" name="TextBox 36"/>
+          <p:cNvPr id="13" name="TextBox 12"/>
           <p:cNvSpPr txBox="1"/>
           <p:nvPr/>
         </p:nvSpPr>
@@ -4575,7 +3555,7 @@
       </p:sp>
       <p:sp>
         <p:nvSpPr>
-          <p:cNvPr id="38" name="TextBox 37"/>
+          <p:cNvPr id="14" name="TextBox 13"/>
           <p:cNvSpPr txBox="1"/>
           <p:nvPr/>
         </p:nvSpPr>
@@ -4610,7 +3590,7 @@
       </p:sp>
       <p:sp>
         <p:nvSpPr>
-          <p:cNvPr id="39" name="TextBox 38"/>
+          <p:cNvPr id="15" name="TextBox 14"/>
           <p:cNvSpPr txBox="1"/>
           <p:nvPr/>
         </p:nvSpPr>
@@ -4645,7 +3625,7 @@
       </p:sp>
       <p:sp>
         <p:nvSpPr>
-          <p:cNvPr id="40" name="TextBox 39"/>
+          <p:cNvPr id="16" name="TextBox 15"/>
           <p:cNvSpPr txBox="1"/>
           <p:nvPr/>
         </p:nvSpPr>
@@ -4680,7 +3660,7 @@
       </p:sp>
       <p:sp>
         <p:nvSpPr>
-          <p:cNvPr id="41" name="TextBox 40"/>
+          <p:cNvPr id="17" name="TextBox 16"/>
           <p:cNvSpPr txBox="1"/>
           <p:nvPr/>
         </p:nvSpPr>
@@ -4719,7 +3699,7 @@
       </p:sp>
       <p:sp>
         <p:nvSpPr>
-          <p:cNvPr id="42" name="TextBox 41"/>
+          <p:cNvPr id="18" name="TextBox 17"/>
           <p:cNvSpPr txBox="1"/>
           <p:nvPr/>
         </p:nvSpPr>
@@ -4752,6 +3732,102 @@
           </a:p>
         </p:txBody>
       </p:sp>
+      <p:pic>
+        <p:nvPicPr>
+          <p:cNvPr id="19" name="Picture 18" descr="bright-32-feature-sheet_16.png"/>
+          <p:cNvPicPr>
+            <a:picLocks noChangeAspect="1"/>
+          </p:cNvPicPr>
+          <p:nvPr/>
+        </p:nvPicPr>
+        <p:blipFill>
+          <a:blip r:embed="rId2"/>
+          <a:stretch>
+            <a:fillRect/>
+          </a:stretch>
+        </p:blipFill>
+        <p:spPr>
+          <a:xfrm>
+            <a:off x="762000" y="1752600"/>
+            <a:ext cx="10620375" cy="4953000"/>
+          </a:xfrm>
+          <a:prstGeom prst="rect">
+            <a:avLst/>
+          </a:prstGeom>
+        </p:spPr>
+      </p:pic>
+      <p:pic>
+        <p:nvPicPr>
+          <p:cNvPr id="20" name="Picture 19" descr="bright-32-feature-sheet_17.png"/>
+          <p:cNvPicPr>
+            <a:picLocks noChangeAspect="1"/>
+          </p:cNvPicPr>
+          <p:nvPr/>
+        </p:nvPicPr>
+        <p:blipFill>
+          <a:blip r:embed="rId3"/>
+          <a:stretch>
+            <a:fillRect/>
+          </a:stretch>
+        </p:blipFill>
+        <p:spPr>
+          <a:xfrm>
+            <a:off x="762000" y="6934200"/>
+            <a:ext cx="3387626" cy="1905000"/>
+          </a:xfrm>
+          <a:prstGeom prst="rect">
+            <a:avLst/>
+          </a:prstGeom>
+        </p:spPr>
+      </p:pic>
+      <p:pic>
+        <p:nvPicPr>
+          <p:cNvPr id="21" name="Picture 20" descr="bright-32-feature-sheet_18.png"/>
+          <p:cNvPicPr>
+            <a:picLocks noChangeAspect="1"/>
+          </p:cNvPicPr>
+          <p:nvPr/>
+        </p:nvPicPr>
+        <p:blipFill>
+          <a:blip r:embed="rId4"/>
+          <a:stretch>
+            <a:fillRect/>
+          </a:stretch>
+        </p:blipFill>
+        <p:spPr>
+          <a:xfrm>
+            <a:off x="4378226" y="6934200"/>
+            <a:ext cx="3387775" cy="1905000"/>
+          </a:xfrm>
+          <a:prstGeom prst="rect">
+            <a:avLst/>
+          </a:prstGeom>
+        </p:spPr>
+      </p:pic>
+      <p:pic>
+        <p:nvPicPr>
+          <p:cNvPr id="22" name="Picture 21" descr="bright-32-feature-sheet_19.png"/>
+          <p:cNvPicPr>
+            <a:picLocks noChangeAspect="1"/>
+          </p:cNvPicPr>
+          <p:nvPr/>
+        </p:nvPicPr>
+        <p:blipFill>
+          <a:blip r:embed="rId5"/>
+          <a:stretch>
+            <a:fillRect/>
+          </a:stretch>
+        </p:blipFill>
+        <p:spPr>
+          <a:xfrm>
+            <a:off x="7994600" y="6934200"/>
+            <a:ext cx="3387775" cy="1905000"/>
+          </a:xfrm>
+          <a:prstGeom prst="rect">
+            <a:avLst/>
+          </a:prstGeom>
+        </p:spPr>
+      </p:pic>
     </p:spTree>
   </p:cSld>
   <p:clrMapOvr>
